--- a/examples/showcases/assets/outputs/northstar_board_update.pptx
+++ b/examples/showcases/assets/outputs/northstar_board_update.pptx
@@ -3086,7 +3086,7 @@
     <p:bg>
       <p:bgPr>
         <a:solidFill>
-          <a:srgbClr val="0B131F"/>
+          <a:srgbClr val="0D1522"/>
         </a:solidFill>
         <a:effectLst/>
       </p:bgPr>
@@ -3107,7 +3107,7 @@
         <p:spPr>
           <a:xfrm>
             <a:off x="731520" y="731520"/>
-            <a:ext cx="4572000" cy="457200"/>
+            <a:ext cx="5486400" cy="457200"/>
           </a:xfrm>
           <a:prstGeom prst="rect">
             <a:avLst/>
@@ -3123,11 +3123,11 @@
           </a:bodyPr>
           <a:lstStyle/>
           <a:p>
-            <a:pPr algn="l"/>
+            <a:pPr/>
             <a:r>
               <a:rPr sz="1400" b="1">
                 <a:solidFill>
-                  <a:srgbClr val="B4E628"/>
+                  <a:srgbClr val="C8F53C"/>
                 </a:solidFill>
               </a:rPr>
               <a:t>NORTHSTAR / BOARD UPDATE</a:t>
@@ -3144,7 +3144,7 @@
         <p:spPr>
           <a:xfrm>
             <a:off x="731520" y="1828800"/>
-            <a:ext cx="6400800" cy="2743200"/>
+            <a:ext cx="6400800" cy="3200400"/>
           </a:xfrm>
           <a:prstGeom prst="rect">
             <a:avLst/>
@@ -3160,11 +3160,11 @@
           </a:bodyPr>
           <a:lstStyle/>
           <a:p>
-            <a:pPr algn="l"/>
-            <a:r>
-              <a:rPr b="1" sz="7600">
-                <a:solidFill>
-                  <a:srgbClr val="F5F5F5"/>
+            <a:pPr/>
+            <a:r>
+              <a:rPr b="1" sz="8400">
+                <a:solidFill>
+                  <a:srgbClr val="F5F5F0"/>
                 </a:solidFill>
               </a:rPr>
               <a:t>Q2
@@ -3173,7 +3173,7 @@
             <a:r>
               <a:rPr b="1" sz="4400">
                 <a:solidFill>
-                  <a:srgbClr val="F5F5F5"/>
+                  <a:srgbClr val="F5F5F0"/>
                 </a:solidFill>
               </a:rPr>
               <a:t>A sharper path
@@ -3190,7 +3190,7 @@
         </p:nvSpPr>
         <p:spPr>
           <a:xfrm>
-            <a:off x="731520" y="3931920"/>
+            <a:off x="731520" y="4937760"/>
             <a:ext cx="5486400" cy="457200"/>
           </a:xfrm>
           <a:prstGeom prst="rect">
@@ -3207,11 +3207,11 @@
           </a:bodyPr>
           <a:lstStyle/>
           <a:p>
-            <a:pPr algn="l"/>
-            <a:r>
-              <a:rPr sz="1800">
-                <a:solidFill>
-                  <a:srgbClr val="A0AFC3"/>
+            <a:pPr/>
+            <a:r>
+              <a:rPr sz="2000">
+                <a:solidFill>
+                  <a:srgbClr val="8C9BAF"/>
                 </a:solidFill>
               </a:rPr>
               <a:t>Executive operating review</a:t>
@@ -3227,8 +3227,8 @@
         </p:nvSpPr>
         <p:spPr>
           <a:xfrm>
-            <a:off x="731520" y="5486400"/>
-            <a:ext cx="4572000" cy="502920"/>
+            <a:off x="731520" y="5760720"/>
+            <a:ext cx="5212080" cy="685800"/>
           </a:xfrm>
           <a:prstGeom prst="roundRect">
             <a:avLst/>
@@ -3236,9 +3236,9 @@
           <a:solidFill>
             <a:srgbClr val="162232"/>
           </a:solidFill>
-          <a:ln w="12700">
+          <a:ln>
             <a:solidFill>
-              <a:srgbClr val="1E2D41"/>
+              <a:srgbClr val="162232"/>
             </a:solidFill>
           </a:ln>
         </p:spPr>
@@ -3260,14 +3260,30 @@
           <a:bodyPr rtlCol="0" anchor="ctr"/>
           <a:lstStyle/>
           <a:p>
-            <a:pPr/>
-            <a:r>
-              <a:rPr sz="1100">
-                <a:solidFill>
-                  <a:srgbClr val="DCE6F0"/>
+            <a:pPr algn="ctr"/>
+            <a:r>
+              <a:rPr b="1" sz="1400">
+                <a:solidFill>
+                  <a:srgbClr val="F5F5F0"/>
                 </a:solidFill>
               </a:rPr>
-              <a:t>JUNE 2026    |    SAN FRANCISCO</a:t>
+              <a:t>JUNE 2026</a:t>
+            </a:r>
+            <a:r>
+              <a:rPr b="0" sz="1400">
+                <a:solidFill>
+                  <a:srgbClr val="465569"/>
+                </a:solidFill>
+              </a:rPr>
+              <a:t>   |   </a:t>
+            </a:r>
+            <a:r>
+              <a:rPr b="0" sz="1400">
+                <a:solidFill>
+                  <a:srgbClr val="B4C3D2"/>
+                </a:solidFill>
+              </a:rPr>
+              <a:t>SAN FRANCISCO</a:t>
             </a:r>
           </a:p>
         </p:txBody>
@@ -3280,8 +3296,8 @@
         </p:nvSpPr>
         <p:spPr>
           <a:xfrm>
-            <a:off x="10515600" y="5760720"/>
-            <a:ext cx="914400" cy="365760"/>
+            <a:off x="10972800" y="5943600"/>
+            <a:ext cx="731520" cy="457200"/>
           </a:xfrm>
           <a:prstGeom prst="rect">
             <a:avLst/>
@@ -3299,7 +3315,7 @@
           <a:p>
             <a:pPr algn="r"/>
             <a:r>
-              <a:rPr sz="1400" b="0">
+              <a:rPr sz="1600">
                 <a:solidFill>
                   <a:srgbClr val="8C9BAF"/>
                 </a:solidFill>
@@ -3309,6 +3325,127 @@
           </a:p>
         </p:txBody>
       </p:sp>
+      <p:sp>
+        <p:nvSpPr>
+          <p:cNvPr id="7" name="Oval 6"/>
+          <p:cNvSpPr/>
+          <p:nvPr/>
+        </p:nvSpPr>
+        <p:spPr>
+          <a:xfrm>
+            <a:off x="7772400" y="0"/>
+            <a:ext cx="5029200" cy="5029200"/>
+          </a:xfrm>
+          <a:prstGeom prst="ellipse">
+            <a:avLst/>
+          </a:prstGeom>
+          <a:noFill/>
+          <a:ln w="25400">
+            <a:solidFill>
+              <a:srgbClr val="2D3C50"/>
+            </a:solidFill>
+          </a:ln>
+        </p:spPr>
+        <p:style>
+          <a:lnRef idx="1">
+            <a:schemeClr val="accent1"/>
+          </a:lnRef>
+          <a:fillRef idx="3">
+            <a:schemeClr val="accent1"/>
+          </a:fillRef>
+          <a:effectRef idx="2">
+            <a:schemeClr val="accent1"/>
+          </a:effectRef>
+          <a:fontRef idx="minor">
+            <a:schemeClr val="lt1"/>
+          </a:fontRef>
+        </p:style>
+        <p:txBody>
+          <a:bodyPr rtlCol="0" anchor="ctr"/>
+          <a:lstStyle/>
+          <a:p>
+            <a:pPr algn="ctr"/>
+          </a:p>
+        </p:txBody>
+      </p:sp>
+      <p:sp>
+        <p:nvSpPr>
+          <p:cNvPr id="8" name="Oval 7"/>
+          <p:cNvSpPr/>
+          <p:nvPr/>
+        </p:nvSpPr>
+        <p:spPr>
+          <a:xfrm>
+            <a:off x="9418320" y="0"/>
+            <a:ext cx="3200400" cy="2103120"/>
+          </a:xfrm>
+          <a:prstGeom prst="ellipse">
+            <a:avLst/>
+          </a:prstGeom>
+          <a:noFill/>
+          <a:ln w="38100">
+            <a:solidFill>
+              <a:srgbClr val="C8F53C"/>
+            </a:solidFill>
+          </a:ln>
+        </p:spPr>
+        <p:style>
+          <a:lnRef idx="1">
+            <a:schemeClr val="accent1"/>
+          </a:lnRef>
+          <a:fillRef idx="3">
+            <a:schemeClr val="accent1"/>
+          </a:fillRef>
+          <a:effectRef idx="2">
+            <a:schemeClr val="accent1"/>
+          </a:effectRef>
+          <a:fontRef idx="minor">
+            <a:schemeClr val="lt1"/>
+          </a:fontRef>
+        </p:style>
+        <p:txBody>
+          <a:bodyPr rtlCol="0" anchor="ctr"/>
+          <a:lstStyle/>
+          <a:p>
+            <a:pPr algn="ctr"/>
+          </a:p>
+        </p:txBody>
+      </p:sp>
+      <p:cxnSp>
+        <p:nvCxnSpPr>
+          <p:cNvPr id="9" name="Connector 8"/>
+          <p:cNvCxnSpPr/>
+          <p:nvPr/>
+        </p:nvCxnSpPr>
+        <p:spPr>
+          <a:xfrm>
+            <a:off x="8046720" y="0"/>
+            <a:ext cx="3840480" cy="3657600"/>
+          </a:xfrm>
+          <a:prstGeom prst="line">
+            <a:avLst/>
+          </a:prstGeom>
+          <a:ln w="12700">
+            <a:solidFill>
+              <a:srgbClr val="3C4B5F"/>
+            </a:solidFill>
+          </a:ln>
+        </p:spPr>
+        <p:style>
+          <a:lnRef idx="2">
+            <a:schemeClr val="accent1"/>
+          </a:lnRef>
+          <a:fillRef idx="0">
+            <a:schemeClr val="accent1"/>
+          </a:fillRef>
+          <a:effectRef idx="1">
+            <a:schemeClr val="accent1"/>
+          </a:effectRef>
+          <a:fontRef idx="minor">
+            <a:schemeClr val="tx1"/>
+          </a:fontRef>
+        </p:style>
+      </p:cxnSp>
     </p:spTree>
   </p:cSld>
   <p:clrMapOvr>
@@ -3323,7 +3460,7 @@
     <p:bg>
       <p:bgPr>
         <a:solidFill>
-          <a:srgbClr val="F5F3EE"/>
+          <a:srgbClr val="F5F3EC"/>
         </a:solidFill>
         <a:effectLst/>
       </p:bgPr>
@@ -3343,8 +3480,8 @@
         </p:nvSpPr>
         <p:spPr>
           <a:xfrm>
-            <a:off x="731520" y="548640"/>
-            <a:ext cx="4572000" cy="365760"/>
+            <a:off x="640080" y="822960"/>
+            <a:ext cx="7315200" cy="1097280"/>
           </a:xfrm>
           <a:prstGeom prst="rect">
             <a:avLst/>
@@ -3360,28 +3497,91 @@
           </a:bodyPr>
           <a:lstStyle/>
           <a:p>
-            <a:pPr algn="l"/>
-            <a:r>
-              <a:rPr sz="1100" b="1">
-                <a:solidFill>
-                  <a:srgbClr val="78828C"/>
+            <a:pPr/>
+            <a:r>
+              <a:rPr b="1" sz="1100">
+                <a:solidFill>
+                  <a:srgbClr val="646E78"/>
                 </a:solidFill>
               </a:rPr>
-              <a:t>Q2 EXECUTIVE PULSE</a:t>
-            </a:r>
-          </a:p>
-        </p:txBody>
-      </p:sp>
-      <p:sp>
-        <p:nvSpPr>
-          <p:cNvPr id="3" name="TextBox 2"/>
+              <a:t>Q2 EXECUTIVE PULSE
+</a:t>
+            </a:r>
+            <a:r>
+              <a:rPr b="1" sz="3200">
+                <a:solidFill>
+                  <a:srgbClr val="141923"/>
+                </a:solidFill>
+              </a:rPr>
+              <a:t>Growth is strong.
+</a:t>
+            </a:r>
+            <a:r>
+              <a:rPr b="1" sz="3200">
+                <a:solidFill>
+                  <a:srgbClr val="EB7364"/>
+                </a:solidFill>
+              </a:rPr>
+              <a:t>Activation is the constraint.</a:t>
+            </a:r>
+          </a:p>
+        </p:txBody>
+      </p:sp>
+      <p:sp>
+        <p:nvSpPr>
+          <p:cNvPr id="3" name="Rounded Rectangle 2"/>
+          <p:cNvSpPr/>
+          <p:nvPr/>
+        </p:nvSpPr>
+        <p:spPr>
+          <a:xfrm>
+            <a:off x="640080" y="2103120"/>
+            <a:ext cx="2606040" cy="1280160"/>
+          </a:xfrm>
+          <a:prstGeom prst="roundRect">
+            <a:avLst/>
+          </a:prstGeom>
+          <a:solidFill>
+            <a:srgbClr val="0D1522"/>
+          </a:solidFill>
+          <a:ln>
+            <a:solidFill>
+              <a:srgbClr val="0D1522"/>
+            </a:solidFill>
+          </a:ln>
+        </p:spPr>
+        <p:style>
+          <a:lnRef idx="1">
+            <a:schemeClr val="accent1"/>
+          </a:lnRef>
+          <a:fillRef idx="3">
+            <a:schemeClr val="accent1"/>
+          </a:fillRef>
+          <a:effectRef idx="2">
+            <a:schemeClr val="accent1"/>
+          </a:effectRef>
+          <a:fontRef idx="minor">
+            <a:schemeClr val="lt1"/>
+          </a:fontRef>
+        </p:style>
+        <p:txBody>
+          <a:bodyPr rtlCol="0" anchor="ctr"/>
+          <a:lstStyle/>
+          <a:p>
+            <a:pPr algn="ctr"/>
+          </a:p>
+        </p:txBody>
+      </p:sp>
+      <p:sp>
+        <p:nvSpPr>
+          <p:cNvPr id="4" name="TextBox 3"/>
           <p:cNvSpPr txBox="1"/>
           <p:nvPr/>
         </p:nvSpPr>
         <p:spPr>
           <a:xfrm>
-            <a:off x="731520" y="914400"/>
-            <a:ext cx="8229600" cy="1097280"/>
+            <a:off x="777240" y="2240280"/>
+            <a:ext cx="1371600" cy="1005840"/>
           </a:xfrm>
           <a:prstGeom prst="rect">
             <a:avLst/>
@@ -3397,46 +3597,48 @@
           </a:bodyPr>
           <a:lstStyle/>
           <a:p>
-            <a:pPr algn="l"/>
-            <a:r>
-              <a:rPr b="1" sz="3400">
-                <a:solidFill>
-                  <a:srgbClr val="0F1724"/>
+            <a:pPr/>
+            <a:r>
+              <a:rPr b="1" sz="1000">
+                <a:solidFill>
+                  <a:srgbClr val="B4C3D2"/>
                 </a:solidFill>
               </a:rPr>
-              <a:t>Growth is strong.
+              <a:t>ARR
 </a:t>
             </a:r>
             <a:r>
-              <a:rPr b="1" sz="3400">
-                <a:solidFill>
-                  <a:srgbClr val="F06E5F"/>
+              <a:rPr b="1" sz="2800">
+                <a:solidFill>
+                  <a:srgbClr val="FFFFFF"/>
                 </a:solidFill>
               </a:rPr>
-              <a:t>Activation is the constraint.</a:t>
-            </a:r>
-          </a:p>
-        </p:txBody>
-      </p:sp>
-      <p:sp>
-        <p:nvSpPr>
-          <p:cNvPr id="4" name="Rounded Rectangle 3"/>
+              <a:t>$42.8M</a:t>
+            </a:r>
+          </a:p>
+        </p:txBody>
+      </p:sp>
+      <p:sp>
+        <p:nvSpPr>
+          <p:cNvPr id="5" name="Rounded Rectangle 4"/>
           <p:cNvSpPr/>
           <p:nvPr/>
         </p:nvSpPr>
         <p:spPr>
           <a:xfrm>
-            <a:off x="731520" y="2103120"/>
-            <a:ext cx="2468880" cy="1188720"/>
+            <a:off x="2240280" y="2743200"/>
+            <a:ext cx="868680" cy="365760"/>
           </a:xfrm>
           <a:prstGeom prst="roundRect">
             <a:avLst/>
           </a:prstGeom>
           <a:solidFill>
-            <a:srgbClr val="0F1724"/>
+            <a:srgbClr val="C8F53C"/>
           </a:solidFill>
           <a:ln>
-            <a:solidFill/>
+            <a:solidFill>
+              <a:srgbClr val="C8F53C"/>
+            </a:solidFill>
           </a:ln>
         </p:spPr>
         <p:style>
@@ -3454,6 +3656,59 @@
           </a:fontRef>
         </p:style>
         <p:txBody>
+          <a:bodyPr rtlCol="0" anchor="ctr" wrap="square"/>
+          <a:lstStyle/>
+          <a:p>
+            <a:pPr/>
+            <a:r>
+              <a:rPr sz="1100" b="1">
+                <a:solidFill>
+                  <a:srgbClr val="0D1522"/>
+                </a:solidFill>
+              </a:rPr>
+              <a:t>+38% YoY</a:t>
+            </a:r>
+          </a:p>
+        </p:txBody>
+      </p:sp>
+      <p:sp>
+        <p:nvSpPr>
+          <p:cNvPr id="6" name="Rounded Rectangle 5"/>
+          <p:cNvSpPr/>
+          <p:nvPr/>
+        </p:nvSpPr>
+        <p:spPr>
+          <a:xfrm>
+            <a:off x="3337560" y="2103120"/>
+            <a:ext cx="2606040" cy="1280160"/>
+          </a:xfrm>
+          <a:prstGeom prst="roundRect">
+            <a:avLst/>
+          </a:prstGeom>
+          <a:solidFill>
+            <a:srgbClr val="FFFFFF"/>
+          </a:solidFill>
+          <a:ln>
+            <a:solidFill>
+              <a:srgbClr val="FFFFFF"/>
+            </a:solidFill>
+          </a:ln>
+        </p:spPr>
+        <p:style>
+          <a:lnRef idx="1">
+            <a:schemeClr val="accent1"/>
+          </a:lnRef>
+          <a:fillRef idx="3">
+            <a:schemeClr val="accent1"/>
+          </a:fillRef>
+          <a:effectRef idx="2">
+            <a:schemeClr val="accent1"/>
+          </a:effectRef>
+          <a:fontRef idx="minor">
+            <a:schemeClr val="lt1"/>
+          </a:fontRef>
+        </p:style>
+        <p:txBody>
           <a:bodyPr rtlCol="0" anchor="ctr"/>
           <a:lstStyle/>
           <a:p>
@@ -3463,14 +3718,14 @@
       </p:sp>
       <p:sp>
         <p:nvSpPr>
-          <p:cNvPr id="5" name="TextBox 4"/>
+          <p:cNvPr id="7" name="TextBox 6"/>
           <p:cNvSpPr txBox="1"/>
           <p:nvPr/>
         </p:nvSpPr>
         <p:spPr>
           <a:xfrm>
-            <a:off x="868680" y="2240280"/>
-            <a:ext cx="1828800" cy="274320"/>
+            <a:off x="3474720" y="2240280"/>
+            <a:ext cx="1554480" cy="1005840"/>
           </a:xfrm>
           <a:prstGeom prst="rect">
             <a:avLst/>
@@ -3486,28 +3741,135 @@
           </a:bodyPr>
           <a:lstStyle/>
           <a:p>
-            <a:pPr algn="l"/>
-            <a:r>
-              <a:rPr sz="1000" b="1">
-                <a:solidFill>
-                  <a:srgbClr val="A0AFC3"/>
+            <a:pPr/>
+            <a:r>
+              <a:rPr b="1" sz="1000">
+                <a:solidFill>
+                  <a:srgbClr val="646E7D"/>
                 </a:solidFill>
               </a:rPr>
-              <a:t>ARR</a:t>
-            </a:r>
-          </a:p>
-        </p:txBody>
-      </p:sp>
-      <p:sp>
-        <p:nvSpPr>
-          <p:cNvPr id="6" name="TextBox 5"/>
+              <a:t>NET REVENUE RETENTION
+</a:t>
+            </a:r>
+            <a:r>
+              <a:rPr b="1" sz="2800">
+                <a:solidFill>
+                  <a:srgbClr val="0D1522"/>
+                </a:solidFill>
+              </a:rPr>
+              <a:t>118%</a:t>
+            </a:r>
+          </a:p>
+        </p:txBody>
+      </p:sp>
+      <p:sp>
+        <p:nvSpPr>
+          <p:cNvPr id="8" name="Rounded Rectangle 7"/>
+          <p:cNvSpPr/>
+          <p:nvPr/>
+        </p:nvSpPr>
+        <p:spPr>
+          <a:xfrm>
+            <a:off x="4983480" y="2743200"/>
+            <a:ext cx="777240" cy="365760"/>
+          </a:xfrm>
+          <a:prstGeom prst="roundRect">
+            <a:avLst/>
+          </a:prstGeom>
+          <a:solidFill>
+            <a:srgbClr val="D7E6F5"/>
+          </a:solidFill>
+          <a:ln>
+            <a:solidFill>
+              <a:srgbClr val="D7E6F5"/>
+            </a:solidFill>
+          </a:ln>
+        </p:spPr>
+        <p:style>
+          <a:lnRef idx="1">
+            <a:schemeClr val="accent1"/>
+          </a:lnRef>
+          <a:fillRef idx="3">
+            <a:schemeClr val="accent1"/>
+          </a:fillRef>
+          <a:effectRef idx="2">
+            <a:schemeClr val="accent1"/>
+          </a:effectRef>
+          <a:fontRef idx="minor">
+            <a:schemeClr val="lt1"/>
+          </a:fontRef>
+        </p:style>
+        <p:txBody>
+          <a:bodyPr rtlCol="0" anchor="ctr" wrap="square"/>
+          <a:lstStyle/>
+          <a:p>
+            <a:pPr/>
+            <a:r>
+              <a:rPr sz="1100" b="1">
+                <a:solidFill>
+                  <a:srgbClr val="0D1522"/>
+                </a:solidFill>
+              </a:rPr>
+              <a:t>+4 pts</a:t>
+            </a:r>
+          </a:p>
+        </p:txBody>
+      </p:sp>
+      <p:sp>
+        <p:nvSpPr>
+          <p:cNvPr id="9" name="Rounded Rectangle 8"/>
+          <p:cNvSpPr/>
+          <p:nvPr/>
+        </p:nvSpPr>
+        <p:spPr>
+          <a:xfrm>
+            <a:off x="6035040" y="2103120"/>
+            <a:ext cx="2606040" cy="1280160"/>
+          </a:xfrm>
+          <a:prstGeom prst="roundRect">
+            <a:avLst/>
+          </a:prstGeom>
+          <a:solidFill>
+            <a:srgbClr val="FFFFFF"/>
+          </a:solidFill>
+          <a:ln>
+            <a:solidFill>
+              <a:srgbClr val="FFFFFF"/>
+            </a:solidFill>
+          </a:ln>
+        </p:spPr>
+        <p:style>
+          <a:lnRef idx="1">
+            <a:schemeClr val="accent1"/>
+          </a:lnRef>
+          <a:fillRef idx="3">
+            <a:schemeClr val="accent1"/>
+          </a:fillRef>
+          <a:effectRef idx="2">
+            <a:schemeClr val="accent1"/>
+          </a:effectRef>
+          <a:fontRef idx="minor">
+            <a:schemeClr val="lt1"/>
+          </a:fontRef>
+        </p:style>
+        <p:txBody>
+          <a:bodyPr rtlCol="0" anchor="ctr"/>
+          <a:lstStyle/>
+          <a:p>
+            <a:pPr algn="ctr"/>
+          </a:p>
+        </p:txBody>
+      </p:sp>
+      <p:sp>
+        <p:nvSpPr>
+          <p:cNvPr id="10" name="TextBox 9"/>
           <p:cNvSpPr txBox="1"/>
           <p:nvPr/>
         </p:nvSpPr>
         <p:spPr>
           <a:xfrm>
-            <a:off x="868680" y="2560320"/>
-            <a:ext cx="1371600" cy="548640"/>
+            <a:off x="6172200" y="2240280"/>
+            <a:ext cx="1554480" cy="1005840"/>
           </a:xfrm>
           <a:prstGeom prst="rect">
             <a:avLst/>
@@ -3523,37 +3885,48 @@
           </a:bodyPr>
           <a:lstStyle/>
           <a:p>
-            <a:pPr algn="l"/>
-            <a:r>
-              <a:rPr sz="2800" b="1">
-                <a:solidFill>
-                  <a:srgbClr val="FFFFFF"/>
+            <a:pPr/>
+            <a:r>
+              <a:rPr b="1" sz="1000">
+                <a:solidFill>
+                  <a:srgbClr val="646E7D"/>
                 </a:solidFill>
               </a:rPr>
-              <a:t>$42.8M</a:t>
-            </a:r>
-          </a:p>
-        </p:txBody>
-      </p:sp>
-      <p:sp>
-        <p:nvSpPr>
-          <p:cNvPr id="7" name="Rounded Rectangle 6"/>
+              <a:t>GROSS MARGIN
+</a:t>
+            </a:r>
+            <a:r>
+              <a:rPr b="1" sz="2800">
+                <a:solidFill>
+                  <a:srgbClr val="0D1522"/>
+                </a:solidFill>
+              </a:rPr>
+              <a:t>76%</a:t>
+            </a:r>
+          </a:p>
+        </p:txBody>
+      </p:sp>
+      <p:sp>
+        <p:nvSpPr>
+          <p:cNvPr id="11" name="Rounded Rectangle 10"/>
           <p:cNvSpPr/>
           <p:nvPr/>
         </p:nvSpPr>
         <p:spPr>
           <a:xfrm>
-            <a:off x="2286000" y="2697480"/>
-            <a:ext cx="777240" cy="320040"/>
+            <a:off x="7680960" y="2743200"/>
+            <a:ext cx="777240" cy="365760"/>
           </a:xfrm>
           <a:prstGeom prst="roundRect">
             <a:avLst/>
           </a:prstGeom>
           <a:solidFill>
-            <a:srgbClr val="C8F528"/>
+            <a:srgbClr val="D7E6F5"/>
           </a:solidFill>
           <a:ln>
-            <a:solidFill/>
+            <a:solidFill>
+              <a:srgbClr val="D7E6F5"/>
+            </a:solidFill>
           </a:ln>
         </p:spPr>
         <p:style>
@@ -3571,31 +3944,31 @@
           </a:fontRef>
         </p:style>
         <p:txBody>
-          <a:bodyPr rtlCol="0" anchor="ctr"/>
+          <a:bodyPr rtlCol="0" anchor="ctr" wrap="square"/>
           <a:lstStyle/>
           <a:p>
             <a:pPr/>
             <a:r>
-              <a:rPr sz="1100">
-                <a:solidFill>
-                  <a:srgbClr val="0F1724"/>
+              <a:rPr sz="1100" b="1">
+                <a:solidFill>
+                  <a:srgbClr val="0D1522"/>
                 </a:solidFill>
               </a:rPr>
-              <a:t>+38% YoY</a:t>
-            </a:r>
-          </a:p>
-        </p:txBody>
-      </p:sp>
-      <p:sp>
-        <p:nvSpPr>
-          <p:cNvPr id="8" name="Rounded Rectangle 7"/>
+              <a:t>+2 pts</a:t>
+            </a:r>
+          </a:p>
+        </p:txBody>
+      </p:sp>
+      <p:sp>
+        <p:nvSpPr>
+          <p:cNvPr id="12" name="Rounded Rectangle 11"/>
           <p:cNvSpPr/>
           <p:nvPr/>
         </p:nvSpPr>
         <p:spPr>
           <a:xfrm>
-            <a:off x="3383280" y="2103120"/>
-            <a:ext cx="2468880" cy="1188720"/>
+            <a:off x="8732520" y="2103120"/>
+            <a:ext cx="2606040" cy="1280160"/>
           </a:xfrm>
           <a:prstGeom prst="roundRect">
             <a:avLst/>
@@ -3604,7 +3977,9 @@
             <a:srgbClr val="FFFFFF"/>
           </a:solidFill>
           <a:ln>
-            <a:solidFill/>
+            <a:solidFill>
+              <a:srgbClr val="FFFFFF"/>
+            </a:solidFill>
           </a:ln>
         </p:spPr>
         <p:style>
@@ -3631,14 +4006,14 @@
       </p:sp>
       <p:sp>
         <p:nvSpPr>
-          <p:cNvPr id="9" name="TextBox 8"/>
+          <p:cNvPr id="13" name="TextBox 12"/>
           <p:cNvSpPr txBox="1"/>
           <p:nvPr/>
         </p:nvSpPr>
         <p:spPr>
           <a:xfrm>
-            <a:off x="3520440" y="2240280"/>
-            <a:ext cx="2194560" cy="274320"/>
+            <a:off x="8869680" y="2240280"/>
+            <a:ext cx="1554480" cy="1005840"/>
           </a:xfrm>
           <a:prstGeom prst="rect">
             <a:avLst/>
@@ -3654,28 +4029,90 @@
           </a:bodyPr>
           <a:lstStyle/>
           <a:p>
-            <a:pPr algn="l"/>
-            <a:r>
-              <a:rPr sz="1000" b="1">
+            <a:pPr/>
+            <a:r>
+              <a:rPr b="1" sz="1000">
                 <a:solidFill>
                   <a:srgbClr val="646E7D"/>
                 </a:solidFill>
               </a:rPr>
-              <a:t>NET REVENUE RETENTION</a:t>
-            </a:r>
-          </a:p>
-        </p:txBody>
-      </p:sp>
-      <p:sp>
-        <p:nvSpPr>
-          <p:cNvPr id="10" name="TextBox 9"/>
+              <a:t>7-DAY ACTIVATION
+</a:t>
+            </a:r>
+            <a:r>
+              <a:rPr b="1" sz="2800">
+                <a:solidFill>
+                  <a:srgbClr val="0D1522"/>
+                </a:solidFill>
+              </a:rPr>
+              <a:t>61%</a:t>
+            </a:r>
+          </a:p>
+        </p:txBody>
+      </p:sp>
+      <p:sp>
+        <p:nvSpPr>
+          <p:cNvPr id="14" name="Rounded Rectangle 13"/>
+          <p:cNvSpPr/>
+          <p:nvPr/>
+        </p:nvSpPr>
+        <p:spPr>
+          <a:xfrm>
+            <a:off x="10378440" y="2743200"/>
+            <a:ext cx="777240" cy="365760"/>
+          </a:xfrm>
+          <a:prstGeom prst="roundRect">
+            <a:avLst/>
+          </a:prstGeom>
+          <a:solidFill>
+            <a:srgbClr val="FFDCD7"/>
+          </a:solidFill>
+          <a:ln>
+            <a:solidFill>
+              <a:srgbClr val="FFDCD7"/>
+            </a:solidFill>
+          </a:ln>
+        </p:spPr>
+        <p:style>
+          <a:lnRef idx="1">
+            <a:schemeClr val="accent1"/>
+          </a:lnRef>
+          <a:fillRef idx="3">
+            <a:schemeClr val="accent1"/>
+          </a:fillRef>
+          <a:effectRef idx="2">
+            <a:schemeClr val="accent1"/>
+          </a:effectRef>
+          <a:fontRef idx="minor">
+            <a:schemeClr val="lt1"/>
+          </a:fontRef>
+        </p:style>
+        <p:txBody>
+          <a:bodyPr rtlCol="0" anchor="ctr" wrap="square"/>
+          <a:lstStyle/>
+          <a:p>
+            <a:pPr/>
+            <a:r>
+              <a:rPr sz="1100" b="1">
+                <a:solidFill>
+                  <a:srgbClr val="B43228"/>
+                </a:solidFill>
+              </a:rPr>
+              <a:t>-7 pts</a:t>
+            </a:r>
+          </a:p>
+        </p:txBody>
+      </p:sp>
+      <p:sp>
+        <p:nvSpPr>
+          <p:cNvPr id="15" name="TextBox 14"/>
           <p:cNvSpPr txBox="1"/>
           <p:nvPr/>
         </p:nvSpPr>
         <p:spPr>
           <a:xfrm>
-            <a:off x="3520440" y="2560320"/>
-            <a:ext cx="1280160" cy="548640"/>
+            <a:off x="640080" y="3749039"/>
+            <a:ext cx="4572000" cy="365760"/>
           </a:xfrm>
           <a:prstGeom prst="rect">
             <a:avLst/>
@@ -3691,37 +4128,39 @@
           </a:bodyPr>
           <a:lstStyle/>
           <a:p>
-            <a:pPr algn="l"/>
-            <a:r>
-              <a:rPr sz="2800" b="1">
-                <a:solidFill>
-                  <a:srgbClr val="0F1724"/>
+            <a:pPr/>
+            <a:r>
+              <a:rPr sz="1100" b="1">
+                <a:solidFill>
+                  <a:srgbClr val="646E7D"/>
                 </a:solidFill>
               </a:rPr>
-              <a:t>118%</a:t>
-            </a:r>
-          </a:p>
-        </p:txBody>
-      </p:sp>
-      <p:sp>
-        <p:nvSpPr>
-          <p:cNvPr id="11" name="Rounded Rectangle 10"/>
+              <a:t>ACTIVATION FUNNEL</a:t>
+            </a:r>
+          </a:p>
+        </p:txBody>
+      </p:sp>
+      <p:sp>
+        <p:nvSpPr>
+          <p:cNvPr id="16" name="Rounded Rectangle 15"/>
           <p:cNvSpPr/>
           <p:nvPr/>
         </p:nvSpPr>
         <p:spPr>
           <a:xfrm>
-            <a:off x="4937760" y="2697480"/>
-            <a:ext cx="685800" cy="320040"/>
+            <a:off x="640080" y="4160520"/>
+            <a:ext cx="7589520" cy="411480"/>
           </a:xfrm>
           <a:prstGeom prst="roundRect">
             <a:avLst/>
           </a:prstGeom>
           <a:solidFill>
-            <a:srgbClr val="D7E6F5"/>
+            <a:srgbClr val="0D1522"/>
           </a:solidFill>
           <a:ln>
-            <a:solidFill/>
+            <a:solidFill>
+              <a:srgbClr val="0D1522"/>
+            </a:solidFill>
           </a:ln>
         </p:spPr>
         <p:style>
@@ -3739,31 +4178,190 @@
           </a:fontRef>
         </p:style>
         <p:txBody>
-          <a:bodyPr rtlCol="0" anchor="ctr"/>
-          <a:lstStyle/>
-          <a:p>
-            <a:pPr/>
-            <a:r>
-              <a:rPr sz="1100">
-                <a:solidFill>
-                  <a:srgbClr val="0F1724"/>
+          <a:bodyPr rtlCol="0" anchor="ctr" wrap="square"/>
+          <a:lstStyle/>
+          <a:p>
+            <a:pPr algn="l"/>
+            <a:r>
+              <a:rPr sz="1300" b="1">
+                <a:solidFill>
+                  <a:srgbClr val="FFFFFF"/>
                 </a:solidFill>
               </a:rPr>
-              <a:t>+4 pts</a:t>
-            </a:r>
-          </a:p>
-        </p:txBody>
-      </p:sp>
-      <p:sp>
-        <p:nvSpPr>
-          <p:cNvPr id="12" name="Rounded Rectangle 11"/>
+              <a:t>12.4k   Signed up</a:t>
+            </a:r>
+          </a:p>
+        </p:txBody>
+      </p:sp>
+      <p:sp>
+        <p:nvSpPr>
+          <p:cNvPr id="17" name="Rounded Rectangle 16"/>
           <p:cNvSpPr/>
           <p:nvPr/>
         </p:nvSpPr>
         <p:spPr>
           <a:xfrm>
-            <a:off x="6035040" y="2103120"/>
-            <a:ext cx="2468880" cy="1188720"/>
+            <a:off x="640080" y="4663440"/>
+            <a:ext cx="4937760" cy="411480"/>
+          </a:xfrm>
+          <a:prstGeom prst="roundRect">
+            <a:avLst/>
+          </a:prstGeom>
+          <a:solidFill>
+            <a:srgbClr val="2A445C"/>
+          </a:solidFill>
+          <a:ln>
+            <a:solidFill>
+              <a:srgbClr val="2A445C"/>
+            </a:solidFill>
+          </a:ln>
+        </p:spPr>
+        <p:style>
+          <a:lnRef idx="1">
+            <a:schemeClr val="accent1"/>
+          </a:lnRef>
+          <a:fillRef idx="3">
+            <a:schemeClr val="accent1"/>
+          </a:fillRef>
+          <a:effectRef idx="2">
+            <a:schemeClr val="accent1"/>
+          </a:effectRef>
+          <a:fontRef idx="minor">
+            <a:schemeClr val="lt1"/>
+          </a:fontRef>
+        </p:style>
+        <p:txBody>
+          <a:bodyPr rtlCol="0" anchor="ctr" wrap="square"/>
+          <a:lstStyle/>
+          <a:p>
+            <a:pPr algn="l"/>
+            <a:r>
+              <a:rPr sz="1300" b="1">
+                <a:solidFill>
+                  <a:srgbClr val="FFFFFF"/>
+                </a:solidFill>
+              </a:rPr>
+              <a:t>8.1k   Connected data</a:t>
+            </a:r>
+          </a:p>
+        </p:txBody>
+      </p:sp>
+      <p:sp>
+        <p:nvSpPr>
+          <p:cNvPr id="18" name="Rounded Rectangle 17"/>
+          <p:cNvSpPr/>
+          <p:nvPr/>
+        </p:nvSpPr>
+        <p:spPr>
+          <a:xfrm>
+            <a:off x="640080" y="5166360"/>
+            <a:ext cx="3657600" cy="411480"/>
+          </a:xfrm>
+          <a:prstGeom prst="roundRect">
+            <a:avLst/>
+          </a:prstGeom>
+          <a:solidFill>
+            <a:srgbClr val="4B6982"/>
+          </a:solidFill>
+          <a:ln>
+            <a:solidFill>
+              <a:srgbClr val="4B6982"/>
+            </a:solidFill>
+          </a:ln>
+        </p:spPr>
+        <p:style>
+          <a:lnRef idx="1">
+            <a:schemeClr val="accent1"/>
+          </a:lnRef>
+          <a:fillRef idx="3">
+            <a:schemeClr val="accent1"/>
+          </a:fillRef>
+          <a:effectRef idx="2">
+            <a:schemeClr val="accent1"/>
+          </a:effectRef>
+          <a:fontRef idx="minor">
+            <a:schemeClr val="lt1"/>
+          </a:fontRef>
+        </p:style>
+        <p:txBody>
+          <a:bodyPr rtlCol="0" anchor="ctr" wrap="square"/>
+          <a:lstStyle/>
+          <a:p>
+            <a:pPr algn="l"/>
+            <a:r>
+              <a:rPr sz="1300" b="1">
+                <a:solidFill>
+                  <a:srgbClr val="FFFFFF"/>
+                </a:solidFill>
+              </a:rPr>
+              <a:t>6.0k   Invited team</a:t>
+            </a:r>
+          </a:p>
+        </p:txBody>
+      </p:sp>
+      <p:sp>
+        <p:nvSpPr>
+          <p:cNvPr id="19" name="Rounded Rectangle 18"/>
+          <p:cNvSpPr/>
+          <p:nvPr/>
+        </p:nvSpPr>
+        <p:spPr>
+          <a:xfrm>
+            <a:off x="640080" y="5669280"/>
+            <a:ext cx="2377440" cy="411480"/>
+          </a:xfrm>
+          <a:prstGeom prst="roundRect">
+            <a:avLst/>
+          </a:prstGeom>
+          <a:solidFill>
+            <a:srgbClr val="C8F53C"/>
+          </a:solidFill>
+          <a:ln>
+            <a:solidFill>
+              <a:srgbClr val="C8F53C"/>
+            </a:solidFill>
+          </a:ln>
+        </p:spPr>
+        <p:style>
+          <a:lnRef idx="1">
+            <a:schemeClr val="accent1"/>
+          </a:lnRef>
+          <a:fillRef idx="3">
+            <a:schemeClr val="accent1"/>
+          </a:fillRef>
+          <a:effectRef idx="2">
+            <a:schemeClr val="accent1"/>
+          </a:effectRef>
+          <a:fontRef idx="minor">
+            <a:schemeClr val="lt1"/>
+          </a:fontRef>
+        </p:style>
+        <p:txBody>
+          <a:bodyPr rtlCol="0" anchor="ctr" wrap="square"/>
+          <a:lstStyle/>
+          <a:p>
+            <a:pPr algn="l"/>
+            <a:r>
+              <a:rPr sz="1300" b="1">
+                <a:solidFill>
+                  <a:srgbClr val="0D1522"/>
+                </a:solidFill>
+              </a:rPr>
+              <a:t>3.9k   Weekly value</a:t>
+            </a:r>
+          </a:p>
+        </p:txBody>
+      </p:sp>
+      <p:sp>
+        <p:nvSpPr>
+          <p:cNvPr id="20" name="Rounded Rectangle 19"/>
+          <p:cNvSpPr/>
+          <p:nvPr/>
+        </p:nvSpPr>
+        <p:spPr>
+          <a:xfrm>
+            <a:off x="8732520" y="3977639"/>
+            <a:ext cx="2834640" cy="2057400"/>
           </a:xfrm>
           <a:prstGeom prst="roundRect">
             <a:avLst/>
@@ -3772,7 +4370,9 @@
             <a:srgbClr val="FFFFFF"/>
           </a:solidFill>
           <a:ln>
-            <a:solidFill/>
+            <a:solidFill>
+              <a:srgbClr val="E6E1D7"/>
+            </a:solidFill>
           </a:ln>
         </p:spPr>
         <p:style>
@@ -3799,14 +4399,14 @@
       </p:sp>
       <p:sp>
         <p:nvSpPr>
-          <p:cNvPr id="13" name="TextBox 12"/>
+          <p:cNvPr id="21" name="TextBox 20"/>
           <p:cNvSpPr txBox="1"/>
           <p:nvPr/>
         </p:nvSpPr>
         <p:spPr>
           <a:xfrm>
-            <a:off x="6172200" y="2240280"/>
-            <a:ext cx="2194560" cy="274320"/>
+            <a:off x="8961120" y="4160520"/>
+            <a:ext cx="2377440" cy="1737360"/>
           </a:xfrm>
           <a:prstGeom prst="rect">
             <a:avLst/>
@@ -3822,28 +4422,48 @@
           </a:bodyPr>
           <a:lstStyle/>
           <a:p>
-            <a:pPr algn="l"/>
-            <a:r>
-              <a:rPr sz="1000" b="1">
+            <a:pPr/>
+            <a:r>
+              <a:rPr b="1" sz="1000">
                 <a:solidFill>
                   <a:srgbClr val="646E7D"/>
                 </a:solidFill>
               </a:rPr>
-              <a:t>GROSS MARGIN</a:t>
-            </a:r>
-          </a:p>
-        </p:txBody>
-      </p:sp>
-      <p:sp>
-        <p:nvSpPr>
-          <p:cNvPr id="14" name="TextBox 13"/>
+              <a:t>BOARD READOUT
+</a:t>
+            </a:r>
+            <a:r>
+              <a:rPr b="1" sz="3600">
+                <a:solidFill>
+                  <a:srgbClr val="EB7364"/>
+                </a:solidFill>
+              </a:rPr>
+              <a:t>35%
+</a:t>
+            </a:r>
+            <a:r>
+              <a:rPr b="0" sz="1200">
+                <a:solidFill>
+                  <a:srgbClr val="28323C"/>
+                </a:solidFill>
+              </a:rPr>
+              <a:t>of sign-ups never connect
+a data source — the
+largest controllable leak.</a:t>
+            </a:r>
+          </a:p>
+        </p:txBody>
+      </p:sp>
+      <p:sp>
+        <p:nvSpPr>
+          <p:cNvPr id="22" name="TextBox 21"/>
           <p:cNvSpPr txBox="1"/>
           <p:nvPr/>
         </p:nvSpPr>
         <p:spPr>
           <a:xfrm>
-            <a:off x="6172200" y="2560320"/>
-            <a:ext cx="1280160" cy="548640"/>
+            <a:off x="10972800" y="5943600"/>
+            <a:ext cx="731520" cy="457200"/>
           </a:xfrm>
           <a:prstGeom prst="rect">
             <a:avLst/>
@@ -3859,610 +4479,11 @@
           </a:bodyPr>
           <a:lstStyle/>
           <a:p>
-            <a:pPr algn="l"/>
-            <a:r>
-              <a:rPr sz="2800" b="1">
-                <a:solidFill>
-                  <a:srgbClr val="0F1724"/>
-                </a:solidFill>
-              </a:rPr>
-              <a:t>76%</a:t>
-            </a:r>
-          </a:p>
-        </p:txBody>
-      </p:sp>
-      <p:sp>
-        <p:nvSpPr>
-          <p:cNvPr id="15" name="Rounded Rectangle 14"/>
-          <p:cNvSpPr/>
-          <p:nvPr/>
-        </p:nvSpPr>
-        <p:spPr>
-          <a:xfrm>
-            <a:off x="7589520" y="2697480"/>
-            <a:ext cx="685800" cy="320040"/>
-          </a:xfrm>
-          <a:prstGeom prst="roundRect">
-            <a:avLst/>
-          </a:prstGeom>
-          <a:solidFill>
-            <a:srgbClr val="D7E6F5"/>
-          </a:solidFill>
-          <a:ln>
-            <a:solidFill/>
-          </a:ln>
-        </p:spPr>
-        <p:style>
-          <a:lnRef idx="1">
-            <a:schemeClr val="accent1"/>
-          </a:lnRef>
-          <a:fillRef idx="3">
-            <a:schemeClr val="accent1"/>
-          </a:fillRef>
-          <a:effectRef idx="2">
-            <a:schemeClr val="accent1"/>
-          </a:effectRef>
-          <a:fontRef idx="minor">
-            <a:schemeClr val="lt1"/>
-          </a:fontRef>
-        </p:style>
-        <p:txBody>
-          <a:bodyPr rtlCol="0" anchor="ctr"/>
-          <a:lstStyle/>
-          <a:p>
-            <a:pPr/>
-            <a:r>
-              <a:rPr sz="1100">
-                <a:solidFill>
-                  <a:srgbClr val="0F1724"/>
-                </a:solidFill>
-              </a:rPr>
-              <a:t>+2 pts</a:t>
-            </a:r>
-          </a:p>
-        </p:txBody>
-      </p:sp>
-      <p:sp>
-        <p:nvSpPr>
-          <p:cNvPr id="16" name="Rounded Rectangle 15"/>
-          <p:cNvSpPr/>
-          <p:nvPr/>
-        </p:nvSpPr>
-        <p:spPr>
-          <a:xfrm>
-            <a:off x="8686800" y="2103120"/>
-            <a:ext cx="2468880" cy="1188720"/>
-          </a:xfrm>
-          <a:prstGeom prst="roundRect">
-            <a:avLst/>
-          </a:prstGeom>
-          <a:solidFill>
-            <a:srgbClr val="FFFFFF"/>
-          </a:solidFill>
-          <a:ln>
-            <a:solidFill/>
-          </a:ln>
-        </p:spPr>
-        <p:style>
-          <a:lnRef idx="1">
-            <a:schemeClr val="accent1"/>
-          </a:lnRef>
-          <a:fillRef idx="3">
-            <a:schemeClr val="accent1"/>
-          </a:fillRef>
-          <a:effectRef idx="2">
-            <a:schemeClr val="accent1"/>
-          </a:effectRef>
-          <a:fontRef idx="minor">
-            <a:schemeClr val="lt1"/>
-          </a:fontRef>
-        </p:style>
-        <p:txBody>
-          <a:bodyPr rtlCol="0" anchor="ctr"/>
-          <a:lstStyle/>
-          <a:p>
-            <a:pPr algn="ctr"/>
-          </a:p>
-        </p:txBody>
-      </p:sp>
-      <p:sp>
-        <p:nvSpPr>
-          <p:cNvPr id="17" name="TextBox 16"/>
-          <p:cNvSpPr txBox="1"/>
-          <p:nvPr/>
-        </p:nvSpPr>
-        <p:spPr>
-          <a:xfrm>
-            <a:off x="8823960" y="2240280"/>
-            <a:ext cx="2194560" cy="274320"/>
-          </a:xfrm>
-          <a:prstGeom prst="rect">
-            <a:avLst/>
-          </a:prstGeom>
-          <a:noFill/>
-          <a:ln>
-            <a:solidFill/>
-          </a:ln>
-        </p:spPr>
-        <p:txBody>
-          <a:bodyPr wrap="square">
-            <a:normAutofit/>
-          </a:bodyPr>
-          <a:lstStyle/>
-          <a:p>
-            <a:pPr algn="l"/>
-            <a:r>
-              <a:rPr sz="1000" b="1">
-                <a:solidFill>
-                  <a:srgbClr val="646E7D"/>
-                </a:solidFill>
-              </a:rPr>
-              <a:t>7-DAY ACTIVATION</a:t>
-            </a:r>
-          </a:p>
-        </p:txBody>
-      </p:sp>
-      <p:sp>
-        <p:nvSpPr>
-          <p:cNvPr id="18" name="TextBox 17"/>
-          <p:cNvSpPr txBox="1"/>
-          <p:nvPr/>
-        </p:nvSpPr>
-        <p:spPr>
-          <a:xfrm>
-            <a:off x="8823960" y="2560320"/>
-            <a:ext cx="1280160" cy="548640"/>
-          </a:xfrm>
-          <a:prstGeom prst="rect">
-            <a:avLst/>
-          </a:prstGeom>
-          <a:noFill/>
-          <a:ln>
-            <a:solidFill/>
-          </a:ln>
-        </p:spPr>
-        <p:txBody>
-          <a:bodyPr wrap="square">
-            <a:normAutofit/>
-          </a:bodyPr>
-          <a:lstStyle/>
-          <a:p>
-            <a:pPr algn="l"/>
-            <a:r>
-              <a:rPr sz="2800" b="1">
-                <a:solidFill>
-                  <a:srgbClr val="0F1724"/>
-                </a:solidFill>
-              </a:rPr>
-              <a:t>61%</a:t>
-            </a:r>
-          </a:p>
-        </p:txBody>
-      </p:sp>
-      <p:sp>
-        <p:nvSpPr>
-          <p:cNvPr id="19" name="Rounded Rectangle 18"/>
-          <p:cNvSpPr/>
-          <p:nvPr/>
-        </p:nvSpPr>
-        <p:spPr>
-          <a:xfrm>
-            <a:off x="10241280" y="2697480"/>
-            <a:ext cx="685800" cy="320040"/>
-          </a:xfrm>
-          <a:prstGeom prst="roundRect">
-            <a:avLst/>
-          </a:prstGeom>
-          <a:solidFill>
-            <a:srgbClr val="FFE1E1"/>
-          </a:solidFill>
-          <a:ln>
-            <a:solidFill/>
-          </a:ln>
-        </p:spPr>
-        <p:style>
-          <a:lnRef idx="1">
-            <a:schemeClr val="accent1"/>
-          </a:lnRef>
-          <a:fillRef idx="3">
-            <a:schemeClr val="accent1"/>
-          </a:fillRef>
-          <a:effectRef idx="2">
-            <a:schemeClr val="accent1"/>
-          </a:effectRef>
-          <a:fontRef idx="minor">
-            <a:schemeClr val="lt1"/>
-          </a:fontRef>
-        </p:style>
-        <p:txBody>
-          <a:bodyPr rtlCol="0" anchor="ctr"/>
-          <a:lstStyle/>
-          <a:p>
-            <a:pPr/>
-            <a:r>
-              <a:rPr sz="1100">
-                <a:solidFill>
-                  <a:srgbClr val="D23C3C"/>
-                </a:solidFill>
-              </a:rPr>
-              <a:t>-7 pts</a:t>
-            </a:r>
-          </a:p>
-        </p:txBody>
-      </p:sp>
-      <p:sp>
-        <p:nvSpPr>
-          <p:cNvPr id="20" name="TextBox 19"/>
-          <p:cNvSpPr txBox="1"/>
-          <p:nvPr/>
-        </p:nvSpPr>
-        <p:spPr>
-          <a:xfrm>
-            <a:off x="731520" y="3657600"/>
-            <a:ext cx="4572000" cy="274320"/>
-          </a:xfrm>
-          <a:prstGeom prst="rect">
-            <a:avLst/>
-          </a:prstGeom>
-          <a:noFill/>
-          <a:ln>
-            <a:solidFill/>
-          </a:ln>
-        </p:spPr>
-        <p:txBody>
-          <a:bodyPr wrap="square">
-            <a:normAutofit/>
-          </a:bodyPr>
-          <a:lstStyle/>
-          <a:p>
-            <a:pPr algn="l"/>
-            <a:r>
-              <a:rPr sz="1100" b="1">
-                <a:solidFill>
-                  <a:srgbClr val="78828C"/>
-                </a:solidFill>
-              </a:rPr>
-              <a:t>ACTIVATION FUNNEL</a:t>
-            </a:r>
-          </a:p>
-        </p:txBody>
-      </p:sp>
-      <p:sp>
-        <p:nvSpPr>
-          <p:cNvPr id="21" name="Rounded Rectangle 20"/>
-          <p:cNvSpPr/>
-          <p:nvPr/>
-        </p:nvSpPr>
-        <p:spPr>
-          <a:xfrm>
-            <a:off x="731520" y="4023360"/>
-            <a:ext cx="7635240" cy="411480"/>
-          </a:xfrm>
-          <a:prstGeom prst="roundRect">
-            <a:avLst/>
-          </a:prstGeom>
-          <a:solidFill>
-            <a:srgbClr val="0F1724"/>
-          </a:solidFill>
-          <a:ln>
-            <a:solidFill/>
-          </a:ln>
-        </p:spPr>
-        <p:style>
-          <a:lnRef idx="1">
-            <a:schemeClr val="accent1"/>
-          </a:lnRef>
-          <a:fillRef idx="3">
-            <a:schemeClr val="accent1"/>
-          </a:fillRef>
-          <a:effectRef idx="2">
-            <a:schemeClr val="accent1"/>
-          </a:effectRef>
-          <a:fontRef idx="minor">
-            <a:schemeClr val="lt1"/>
-          </a:fontRef>
-        </p:style>
-        <p:txBody>
-          <a:bodyPr rtlCol="0" anchor="ctr"/>
-          <a:lstStyle/>
-          <a:p>
-            <a:pPr/>
-            <a:r>
-              <a:rPr sz="1200">
-                <a:solidFill>
-                  <a:srgbClr val="FFFFFF"/>
-                </a:solidFill>
-              </a:rPr>
-              <a:t>   12.4k   Signed up</a:t>
-            </a:r>
-          </a:p>
-        </p:txBody>
-      </p:sp>
-      <p:sp>
-        <p:nvSpPr>
-          <p:cNvPr id="22" name="Rounded Rectangle 21"/>
-          <p:cNvSpPr/>
-          <p:nvPr/>
-        </p:nvSpPr>
-        <p:spPr>
-          <a:xfrm>
-            <a:off x="731520" y="4526280"/>
-            <a:ext cx="4983480" cy="411480"/>
-          </a:xfrm>
-          <a:prstGeom prst="roundRect">
-            <a:avLst/>
-          </a:prstGeom>
-          <a:solidFill>
-            <a:srgbClr val="2A415A"/>
-          </a:solidFill>
-          <a:ln>
-            <a:solidFill/>
-          </a:ln>
-        </p:spPr>
-        <p:style>
-          <a:lnRef idx="1">
-            <a:schemeClr val="accent1"/>
-          </a:lnRef>
-          <a:fillRef idx="3">
-            <a:schemeClr val="accent1"/>
-          </a:fillRef>
-          <a:effectRef idx="2">
-            <a:schemeClr val="accent1"/>
-          </a:effectRef>
-          <a:fontRef idx="minor">
-            <a:schemeClr val="lt1"/>
-          </a:fontRef>
-        </p:style>
-        <p:txBody>
-          <a:bodyPr rtlCol="0" anchor="ctr"/>
-          <a:lstStyle/>
-          <a:p>
-            <a:pPr/>
-            <a:r>
-              <a:rPr sz="1200">
-                <a:solidFill>
-                  <a:srgbClr val="FFFFFF"/>
-                </a:solidFill>
-              </a:rPr>
-              <a:t>   8.1k   Connected data</a:t>
-            </a:r>
-          </a:p>
-        </p:txBody>
-      </p:sp>
-      <p:sp>
-        <p:nvSpPr>
-          <p:cNvPr id="23" name="Rounded Rectangle 22"/>
-          <p:cNvSpPr/>
-          <p:nvPr/>
-        </p:nvSpPr>
-        <p:spPr>
-          <a:xfrm>
-            <a:off x="731520" y="5029200"/>
-            <a:ext cx="3657600" cy="411480"/>
-          </a:xfrm>
-          <a:prstGeom prst="roundRect">
-            <a:avLst/>
-          </a:prstGeom>
-          <a:solidFill>
-            <a:srgbClr val="4B6982"/>
-          </a:solidFill>
-          <a:ln>
-            <a:solidFill/>
-          </a:ln>
-        </p:spPr>
-        <p:style>
-          <a:lnRef idx="1">
-            <a:schemeClr val="accent1"/>
-          </a:lnRef>
-          <a:fillRef idx="3">
-            <a:schemeClr val="accent1"/>
-          </a:fillRef>
-          <a:effectRef idx="2">
-            <a:schemeClr val="accent1"/>
-          </a:effectRef>
-          <a:fontRef idx="minor">
-            <a:schemeClr val="lt1"/>
-          </a:fontRef>
-        </p:style>
-        <p:txBody>
-          <a:bodyPr rtlCol="0" anchor="ctr"/>
-          <a:lstStyle/>
-          <a:p>
-            <a:pPr/>
-            <a:r>
-              <a:rPr sz="1200">
-                <a:solidFill>
-                  <a:srgbClr val="FFFFFF"/>
-                </a:solidFill>
-              </a:rPr>
-              <a:t>   6.0k   Invited team</a:t>
-            </a:r>
-          </a:p>
-        </p:txBody>
-      </p:sp>
-      <p:sp>
-        <p:nvSpPr>
-          <p:cNvPr id="24" name="Rounded Rectangle 23"/>
-          <p:cNvSpPr/>
-          <p:nvPr/>
-        </p:nvSpPr>
-        <p:spPr>
-          <a:xfrm>
-            <a:off x="731520" y="5532120"/>
-            <a:ext cx="2377440" cy="411480"/>
-          </a:xfrm>
-          <a:prstGeom prst="roundRect">
-            <a:avLst/>
-          </a:prstGeom>
-          <a:solidFill>
-            <a:srgbClr val="C8F528"/>
-          </a:solidFill>
-          <a:ln>
-            <a:solidFill/>
-          </a:ln>
-        </p:spPr>
-        <p:style>
-          <a:lnRef idx="1">
-            <a:schemeClr val="accent1"/>
-          </a:lnRef>
-          <a:fillRef idx="3">
-            <a:schemeClr val="accent1"/>
-          </a:fillRef>
-          <a:effectRef idx="2">
-            <a:schemeClr val="accent1"/>
-          </a:effectRef>
-          <a:fontRef idx="minor">
-            <a:schemeClr val="lt1"/>
-          </a:fontRef>
-        </p:style>
-        <p:txBody>
-          <a:bodyPr rtlCol="0" anchor="ctr"/>
-          <a:lstStyle/>
-          <a:p>
-            <a:pPr/>
-            <a:r>
-              <a:rPr sz="1200">
-                <a:solidFill>
-                  <a:srgbClr val="0F1724"/>
-                </a:solidFill>
-              </a:rPr>
-              <a:t>   3.9k   Weekly value</a:t>
-            </a:r>
-          </a:p>
-        </p:txBody>
-      </p:sp>
-      <p:sp>
-        <p:nvSpPr>
-          <p:cNvPr id="25" name="Rounded Rectangle 24"/>
-          <p:cNvSpPr/>
-          <p:nvPr/>
-        </p:nvSpPr>
-        <p:spPr>
-          <a:xfrm>
-            <a:off x="8732520" y="4023360"/>
-            <a:ext cx="2834640" cy="1920240"/>
-          </a:xfrm>
-          <a:prstGeom prst="roundRect">
-            <a:avLst/>
-          </a:prstGeom>
-          <a:solidFill>
-            <a:srgbClr val="FFFFFF"/>
-          </a:solidFill>
-          <a:ln w="12700">
-            <a:solidFill>
-              <a:srgbClr val="E6E6E1"/>
-            </a:solidFill>
-          </a:ln>
-        </p:spPr>
-        <p:style>
-          <a:lnRef idx="1">
-            <a:schemeClr val="accent1"/>
-          </a:lnRef>
-          <a:fillRef idx="3">
-            <a:schemeClr val="accent1"/>
-          </a:fillRef>
-          <a:effectRef idx="2">
-            <a:schemeClr val="accent1"/>
-          </a:effectRef>
-          <a:fontRef idx="minor">
-            <a:schemeClr val="lt1"/>
-          </a:fontRef>
-        </p:style>
-        <p:txBody>
-          <a:bodyPr rtlCol="0" anchor="ctr"/>
-          <a:lstStyle/>
-          <a:p>
-            <a:pPr algn="ctr"/>
-          </a:p>
-        </p:txBody>
-      </p:sp>
-      <p:sp>
-        <p:nvSpPr>
-          <p:cNvPr id="26" name="TextBox 25"/>
-          <p:cNvSpPr txBox="1"/>
-          <p:nvPr/>
-        </p:nvSpPr>
-        <p:spPr>
-          <a:xfrm>
-            <a:off x="8961120" y="4206240"/>
-            <a:ext cx="2468880" cy="1645920"/>
-          </a:xfrm>
-          <a:prstGeom prst="rect">
-            <a:avLst/>
-          </a:prstGeom>
-          <a:noFill/>
-          <a:ln>
-            <a:solidFill/>
-          </a:ln>
-        </p:spPr>
-        <p:txBody>
-          <a:bodyPr wrap="square">
-            <a:normAutofit/>
-          </a:bodyPr>
-          <a:lstStyle/>
-          <a:p>
-            <a:pPr algn="l"/>
-            <a:r>
-              <a:rPr b="1" sz="1000">
-                <a:solidFill>
-                  <a:srgbClr val="646E7D"/>
-                </a:solidFill>
-              </a:rPr>
-              <a:t>BOARD READOUT
-</a:t>
-            </a:r>
-            <a:r>
-              <a:rPr b="1" sz="3200">
-                <a:solidFill>
-                  <a:srgbClr val="F06E5F"/>
-                </a:solidFill>
-              </a:rPr>
-              <a:t>35%
-</a:t>
-            </a:r>
-            <a:r>
-              <a:rPr b="0" sz="1200">
-                <a:solidFill>
-                  <a:srgbClr val="0F1724"/>
-                </a:solidFill>
-              </a:rPr>
-              <a:t>of sign-ups never connect
-a data source — the
-largest controllable leak.</a:t>
-            </a:r>
-          </a:p>
-        </p:txBody>
-      </p:sp>
-      <p:sp>
-        <p:nvSpPr>
-          <p:cNvPr id="27" name="TextBox 26"/>
-          <p:cNvSpPr txBox="1"/>
-          <p:nvPr/>
-        </p:nvSpPr>
-        <p:spPr>
-          <a:xfrm>
-            <a:off x="10515600" y="5760720"/>
-            <a:ext cx="914400" cy="365760"/>
-          </a:xfrm>
-          <a:prstGeom prst="rect">
-            <a:avLst/>
-          </a:prstGeom>
-          <a:noFill/>
-          <a:ln>
-            <a:solidFill/>
-          </a:ln>
-        </p:spPr>
-        <p:txBody>
-          <a:bodyPr wrap="square">
-            <a:normAutofit/>
-          </a:bodyPr>
-          <a:lstStyle/>
-          <a:p>
             <a:pPr algn="r"/>
             <a:r>
-              <a:rPr sz="1400" b="0">
-                <a:solidFill>
-                  <a:srgbClr val="8C96A0"/>
+              <a:rPr sz="1400">
+                <a:solidFill>
+                  <a:srgbClr val="8C9196"/>
                 </a:solidFill>
               </a:rPr>
               <a:t>02</a:t>
@@ -4484,7 +4505,7 @@
     <p:bg>
       <p:bgPr>
         <a:solidFill>
-          <a:srgbClr val="0B131F"/>
+          <a:srgbClr val="0D1522"/>
         </a:solidFill>
         <a:effectLst/>
       </p:bgPr>
@@ -4504,8 +4525,8 @@
         </p:nvSpPr>
         <p:spPr>
           <a:xfrm>
-            <a:off x="731520" y="548640"/>
-            <a:ext cx="4572000" cy="365760"/>
+            <a:off x="640080" y="640080"/>
+            <a:ext cx="7315200" cy="1097280"/>
           </a:xfrm>
           <a:prstGeom prst="rect">
             <a:avLst/>
@@ -4521,28 +4542,144 @@
           </a:bodyPr>
           <a:lstStyle/>
           <a:p>
-            <a:pPr algn="l"/>
-            <a:r>
-              <a:rPr sz="1100" b="1">
-                <a:solidFill>
-                  <a:srgbClr val="B4E628"/>
+            <a:pPr/>
+            <a:r>
+              <a:rPr b="1" sz="1100">
+                <a:solidFill>
+                  <a:srgbClr val="C8F53C"/>
                 </a:solidFill>
               </a:rPr>
-              <a:t>THE NEXT 90 DAYS</a:t>
-            </a:r>
-          </a:p>
-        </p:txBody>
-      </p:sp>
-      <p:sp>
-        <p:nvSpPr>
-          <p:cNvPr id="3" name="TextBox 2"/>
+              <a:t>THE NEXT 90 DAYS
+</a:t>
+            </a:r>
+            <a:r>
+              <a:rPr b="1" sz="3200">
+                <a:solidFill>
+                  <a:srgbClr val="FFFFFF"/>
+                </a:solidFill>
+              </a:rPr>
+              <a:t>A focused path to
+</a:t>
+            </a:r>
+            <a:r>
+              <a:rPr b="1" sz="3200">
+                <a:solidFill>
+                  <a:srgbClr val="C8F53C"/>
+                </a:solidFill>
+              </a:rPr>
+              <a:t>70% activation.</a:t>
+            </a:r>
+          </a:p>
+        </p:txBody>
+      </p:sp>
+      <p:sp>
+        <p:nvSpPr>
+          <p:cNvPr id="3" name="Rounded Rectangle 2"/>
+          <p:cNvSpPr/>
+          <p:nvPr/>
+        </p:nvSpPr>
+        <p:spPr>
+          <a:xfrm>
+            <a:off x="640080" y="2194560"/>
+            <a:ext cx="3474720" cy="2834640"/>
+          </a:xfrm>
+          <a:prstGeom prst="roundRect">
+            <a:avLst/>
+          </a:prstGeom>
+          <a:solidFill>
+            <a:srgbClr val="142032"/>
+          </a:solidFill>
+          <a:ln>
+            <a:solidFill>
+              <a:srgbClr val="233750"/>
+            </a:solidFill>
+          </a:ln>
+        </p:spPr>
+        <p:style>
+          <a:lnRef idx="1">
+            <a:schemeClr val="accent1"/>
+          </a:lnRef>
+          <a:fillRef idx="3">
+            <a:schemeClr val="accent1"/>
+          </a:fillRef>
+          <a:effectRef idx="2">
+            <a:schemeClr val="accent1"/>
+          </a:effectRef>
+          <a:fontRef idx="minor">
+            <a:schemeClr val="lt1"/>
+          </a:fontRef>
+        </p:style>
+        <p:txBody>
+          <a:bodyPr rtlCol="0" anchor="ctr"/>
+          <a:lstStyle/>
+          <a:p>
+            <a:pPr algn="ctr"/>
+          </a:p>
+        </p:txBody>
+      </p:sp>
+      <p:sp>
+        <p:nvSpPr>
+          <p:cNvPr id="4" name="Rounded Rectangle 3"/>
+          <p:cNvSpPr/>
+          <p:nvPr/>
+        </p:nvSpPr>
+        <p:spPr>
+          <a:xfrm>
+            <a:off x="868680" y="2423160"/>
+            <a:ext cx="548640" cy="365760"/>
+          </a:xfrm>
+          <a:prstGeom prst="roundRect">
+            <a:avLst/>
+          </a:prstGeom>
+          <a:solidFill>
+            <a:srgbClr val="C8F53C"/>
+          </a:solidFill>
+          <a:ln>
+            <a:solidFill>
+              <a:srgbClr val="C8F53C"/>
+            </a:solidFill>
+          </a:ln>
+        </p:spPr>
+        <p:style>
+          <a:lnRef idx="1">
+            <a:schemeClr val="accent1"/>
+          </a:lnRef>
+          <a:fillRef idx="3">
+            <a:schemeClr val="accent1"/>
+          </a:fillRef>
+          <a:effectRef idx="2">
+            <a:schemeClr val="accent1"/>
+          </a:effectRef>
+          <a:fontRef idx="minor">
+            <a:schemeClr val="lt1"/>
+          </a:fontRef>
+        </p:style>
+        <p:txBody>
+          <a:bodyPr rtlCol="0" anchor="ctr" wrap="square"/>
+          <a:lstStyle/>
+          <a:p>
+            <a:pPr/>
+            <a:r>
+              <a:rPr sz="1200" b="1">
+                <a:solidFill>
+                  <a:srgbClr val="0D1522"/>
+                </a:solidFill>
+              </a:rPr>
+              <a:t>01</a:t>
+            </a:r>
+          </a:p>
+        </p:txBody>
+      </p:sp>
+      <p:sp>
+        <p:nvSpPr>
+          <p:cNvPr id="5" name="TextBox 4"/>
           <p:cNvSpPr txBox="1"/>
           <p:nvPr/>
         </p:nvSpPr>
         <p:spPr>
           <a:xfrm>
-            <a:off x="731520" y="914400"/>
-            <a:ext cx="7315200" cy="1097280"/>
+            <a:off x="868680" y="3017520"/>
+            <a:ext cx="3017520" cy="1828800"/>
           </a:xfrm>
           <a:prstGeom prst="rect">
             <a:avLst/>
@@ -4558,47 +4695,68 @@
           </a:bodyPr>
           <a:lstStyle/>
           <a:p>
-            <a:pPr algn="l"/>
-            <a:r>
-              <a:rPr b="1" sz="3600">
+            <a:pPr/>
+            <a:r>
+              <a:rPr b="1" sz="2200">
                 <a:solidFill>
                   <a:srgbClr val="FFFFFF"/>
                 </a:solidFill>
               </a:rPr>
-              <a:t>A focused path to
+              <a:t>Instrument
 </a:t>
             </a:r>
             <a:r>
-              <a:rPr b="1" sz="3600">
-                <a:solidFill>
-                  <a:srgbClr val="B4E628"/>
+              <a:rPr b="1" sz="1100">
+                <a:solidFill>
+                  <a:srgbClr val="C8F53C"/>
                 </a:solidFill>
               </a:rPr>
-              <a:t>70% activation.</a:t>
-            </a:r>
-          </a:p>
-        </p:txBody>
-      </p:sp>
-      <p:sp>
-        <p:nvSpPr>
-          <p:cNvPr id="4" name="Rounded Rectangle 3"/>
+              <a:t>WEEKS 1-3
+</a:t>
+            </a:r>
+            <a:r>
+              <a:rPr b="0" sz="1300">
+                <a:solidFill>
+                  <a:srgbClr val="B4C3D2"/>
+                </a:solidFill>
+              </a:rPr>
+              <a:t>Find the three moments where
+setup breaks.
+</a:t>
+            </a:r>
+            <a:r>
+              <a:rPr b="0" sz="1300">
+                <a:solidFill>
+                  <a:srgbClr val="C8D7E6"/>
+                </a:solidFill>
+              </a:rPr>
+              <a:t>•  Event taxonomy
+•  Journey replay
+•  Owner baseline</a:t>
+            </a:r>
+          </a:p>
+        </p:txBody>
+      </p:sp>
+      <p:sp>
+        <p:nvSpPr>
+          <p:cNvPr id="6" name="Rounded Rectangle 5"/>
           <p:cNvSpPr/>
           <p:nvPr/>
         </p:nvSpPr>
         <p:spPr>
           <a:xfrm>
-            <a:off x="731520" y="2286000"/>
-            <a:ext cx="3291840" cy="2560320"/>
+            <a:off x="4343400" y="2194560"/>
+            <a:ext cx="3474720" cy="2834640"/>
           </a:xfrm>
           <a:prstGeom prst="roundRect">
             <a:avLst/>
           </a:prstGeom>
           <a:solidFill>
-            <a:srgbClr val="121C2C"/>
+            <a:srgbClr val="142032"/>
           </a:solidFill>
-          <a:ln w="12700">
+          <a:ln>
             <a:solidFill>
-              <a:srgbClr val="23324B"/>
+              <a:srgbClr val="233750"/>
             </a:solidFill>
           </a:ln>
         </p:spPr>
@@ -4626,24 +4784,24 @@
       </p:sp>
       <p:sp>
         <p:nvSpPr>
-          <p:cNvPr id="5" name="Rounded Rectangle 4"/>
+          <p:cNvPr id="7" name="Rounded Rectangle 6"/>
           <p:cNvSpPr/>
           <p:nvPr/>
         </p:nvSpPr>
         <p:spPr>
           <a:xfrm>
-            <a:off x="4434840" y="2286000"/>
-            <a:ext cx="3291840" cy="2560320"/>
+            <a:off x="4572000" y="2423160"/>
+            <a:ext cx="548640" cy="365760"/>
           </a:xfrm>
           <a:prstGeom prst="roundRect">
             <a:avLst/>
           </a:prstGeom>
           <a:solidFill>
-            <a:srgbClr val="121C2C"/>
+            <a:srgbClr val="8CD7F0"/>
           </a:solidFill>
-          <a:ln w="12700">
+          <a:ln>
             <a:solidFill>
-              <a:srgbClr val="23324B"/>
+              <a:srgbClr val="8CD7F0"/>
             </a:solidFill>
           </a:ln>
         </p:spPr>
@@ -4662,153 +4820,14 @@
           </a:fontRef>
         </p:style>
         <p:txBody>
-          <a:bodyPr rtlCol="0" anchor="ctr"/>
-          <a:lstStyle/>
-          <a:p>
-            <a:pPr algn="ctr"/>
-          </a:p>
-        </p:txBody>
-      </p:sp>
-      <p:sp>
-        <p:nvSpPr>
-          <p:cNvPr id="6" name="Rounded Rectangle 5"/>
-          <p:cNvSpPr/>
-          <p:nvPr/>
-        </p:nvSpPr>
-        <p:spPr>
-          <a:xfrm>
-            <a:off x="8138160" y="2286000"/>
-            <a:ext cx="3291840" cy="2560320"/>
-          </a:xfrm>
-          <a:prstGeom prst="roundRect">
-            <a:avLst/>
-          </a:prstGeom>
-          <a:solidFill>
-            <a:srgbClr val="121C2C"/>
-          </a:solidFill>
-          <a:ln w="12700">
-            <a:solidFill>
-              <a:srgbClr val="23324B"/>
-            </a:solidFill>
-          </a:ln>
-        </p:spPr>
-        <p:style>
-          <a:lnRef idx="1">
-            <a:schemeClr val="accent1"/>
-          </a:lnRef>
-          <a:fillRef idx="3">
-            <a:schemeClr val="accent1"/>
-          </a:fillRef>
-          <a:effectRef idx="2">
-            <a:schemeClr val="accent1"/>
-          </a:effectRef>
-          <a:fontRef idx="minor">
-            <a:schemeClr val="lt1"/>
-          </a:fontRef>
-        </p:style>
-        <p:txBody>
-          <a:bodyPr rtlCol="0" anchor="ctr"/>
-          <a:lstStyle/>
-          <a:p>
-            <a:pPr algn="ctr"/>
-          </a:p>
-        </p:txBody>
-      </p:sp>
-      <p:sp>
-        <p:nvSpPr>
-          <p:cNvPr id="7" name="Rounded Rectangle 6"/>
-          <p:cNvSpPr/>
-          <p:nvPr/>
-        </p:nvSpPr>
-        <p:spPr>
-          <a:xfrm>
-            <a:off x="960120" y="2514600"/>
-            <a:ext cx="822960" cy="347472"/>
-          </a:xfrm>
-          <a:prstGeom prst="roundRect">
-            <a:avLst/>
-          </a:prstGeom>
-          <a:solidFill>
-            <a:srgbClr val="B4E628"/>
-          </a:solidFill>
-          <a:ln>
-            <a:solidFill/>
-          </a:ln>
-        </p:spPr>
-        <p:style>
-          <a:lnRef idx="1">
-            <a:schemeClr val="accent1"/>
-          </a:lnRef>
-          <a:fillRef idx="3">
-            <a:schemeClr val="accent1"/>
-          </a:fillRef>
-          <a:effectRef idx="2">
-            <a:schemeClr val="accent1"/>
-          </a:effectRef>
-          <a:fontRef idx="minor">
-            <a:schemeClr val="lt1"/>
-          </a:fontRef>
-        </p:style>
-        <p:txBody>
-          <a:bodyPr rtlCol="0" anchor="ctr"/>
+          <a:bodyPr rtlCol="0" anchor="ctr" wrap="square"/>
           <a:lstStyle/>
           <a:p>
             <a:pPr/>
             <a:r>
-              <a:rPr sz="1400">
-                <a:solidFill>
-                  <a:srgbClr val="0F1724"/>
-                </a:solidFill>
-              </a:rPr>
-              <a:t>01</a:t>
-            </a:r>
-          </a:p>
-        </p:txBody>
-      </p:sp>
-      <p:sp>
-        <p:nvSpPr>
-          <p:cNvPr id="8" name="Rounded Rectangle 7"/>
-          <p:cNvSpPr/>
-          <p:nvPr/>
-        </p:nvSpPr>
-        <p:spPr>
-          <a:xfrm>
-            <a:off x="4663440" y="2514600"/>
-            <a:ext cx="822960" cy="347472"/>
-          </a:xfrm>
-          <a:prstGeom prst="roundRect">
-            <a:avLst/>
-          </a:prstGeom>
-          <a:solidFill>
-            <a:srgbClr val="96D7F5"/>
-          </a:solidFill>
-          <a:ln>
-            <a:solidFill/>
-          </a:ln>
-        </p:spPr>
-        <p:style>
-          <a:lnRef idx="1">
-            <a:schemeClr val="accent1"/>
-          </a:lnRef>
-          <a:fillRef idx="3">
-            <a:schemeClr val="accent1"/>
-          </a:fillRef>
-          <a:effectRef idx="2">
-            <a:schemeClr val="accent1"/>
-          </a:effectRef>
-          <a:fontRef idx="minor">
-            <a:schemeClr val="lt1"/>
-          </a:fontRef>
-        </p:style>
-        <p:txBody>
-          <a:bodyPr rtlCol="0" anchor="ctr"/>
-          <a:lstStyle/>
-          <a:p>
-            <a:pPr/>
-            <a:r>
-              <a:rPr sz="1400">
-                <a:solidFill>
-                  <a:srgbClr val="0F1724"/>
+              <a:rPr sz="1200" b="1">
+                <a:solidFill>
+                  <a:srgbClr val="0D1522"/>
                 </a:solidFill>
               </a:rPr>
               <a:t>02</a:t>
@@ -4818,65 +4837,14 @@
       </p:sp>
       <p:sp>
         <p:nvSpPr>
-          <p:cNvPr id="9" name="Rounded Rectangle 8"/>
-          <p:cNvSpPr/>
-          <p:nvPr/>
-        </p:nvSpPr>
-        <p:spPr>
-          <a:xfrm>
-            <a:off x="8366760" y="2514600"/>
-            <a:ext cx="822960" cy="347472"/>
-          </a:xfrm>
-          <a:prstGeom prst="roundRect">
-            <a:avLst/>
-          </a:prstGeom>
-          <a:solidFill>
-            <a:srgbClr val="E6AFF0"/>
-          </a:solidFill>
-          <a:ln>
-            <a:solidFill/>
-          </a:ln>
-        </p:spPr>
-        <p:style>
-          <a:lnRef idx="1">
-            <a:schemeClr val="accent1"/>
-          </a:lnRef>
-          <a:fillRef idx="3">
-            <a:schemeClr val="accent1"/>
-          </a:fillRef>
-          <a:effectRef idx="2">
-            <a:schemeClr val="accent1"/>
-          </a:effectRef>
-          <a:fontRef idx="minor">
-            <a:schemeClr val="lt1"/>
-          </a:fontRef>
-        </p:style>
-        <p:txBody>
-          <a:bodyPr rtlCol="0" anchor="ctr"/>
-          <a:lstStyle/>
-          <a:p>
-            <a:pPr/>
-            <a:r>
-              <a:rPr sz="1400">
-                <a:solidFill>
-                  <a:srgbClr val="0F1724"/>
-                </a:solidFill>
-              </a:rPr>
-              <a:t>03</a:t>
-            </a:r>
-          </a:p>
-        </p:txBody>
-      </p:sp>
-      <p:sp>
-        <p:nvSpPr>
-          <p:cNvPr id="10" name="TextBox 9"/>
+          <p:cNvPr id="8" name="TextBox 7"/>
           <p:cNvSpPr txBox="1"/>
           <p:nvPr/>
         </p:nvSpPr>
         <p:spPr>
           <a:xfrm>
-            <a:off x="960120" y="3017520"/>
-            <a:ext cx="2834640" cy="1645920"/>
+            <a:off x="4572000" y="3017520"/>
+            <a:ext cx="3017520" cy="1828800"/>
           </a:xfrm>
           <a:prstGeom prst="rect">
             <a:avLst/>
@@ -4892,84 +4860,142 @@
           </a:bodyPr>
           <a:lstStyle/>
           <a:p>
-            <a:pPr algn="l"/>
-            <a:r>
-              <a:rPr b="1" sz="1800">
+            <a:pPr/>
+            <a:r>
+              <a:rPr b="1" sz="2200">
                 <a:solidFill>
                   <a:srgbClr val="FFFFFF"/>
                 </a:solidFill>
               </a:rPr>
-              <a:t>Instrument
+              <a:t>Remove friction
 </a:t>
             </a:r>
             <a:r>
-              <a:rPr b="1" sz="1000">
-                <a:solidFill>
-                  <a:srgbClr val="B4E628"/>
+              <a:rPr b="1" sz="1100">
+                <a:solidFill>
+                  <a:srgbClr val="8CD7F0"/>
                 </a:solidFill>
               </a:rPr>
-              <a:t>WEEKS 1-3
+              <a:t>WEEKS 4-8
 </a:t>
             </a:r>
             <a:r>
-              <a:rPr b="0" sz="1100">
-                <a:solidFill>
-                  <a:srgbClr val="C8D2E1"/>
+              <a:rPr b="0" sz="1300">
+                <a:solidFill>
+                  <a:srgbClr val="B4C3D2"/>
                 </a:solidFill>
               </a:rPr>
-              <a:t>Find the three moments where
-setup breaks.
+              <a:t>Ship the smallest changes that
+unblock first value.
 </a:t>
             </a:r>
             <a:r>
-              <a:rPr b="0" sz="1100">
-                <a:solidFill>
-                  <a:srgbClr val="B4E628"/>
+              <a:rPr b="0" sz="1300">
+                <a:solidFill>
+                  <a:srgbClr val="C8D7E6"/>
                 </a:solidFill>
               </a:rPr>
-              <a:t>•  </a:t>
-            </a:r>
-            <a:r>
-              <a:rPr b="0" sz="1100">
-                <a:solidFill>
-                  <a:srgbClr val="DCE6F0"/>
+              <a:t>•  Guided connector
+•  Role presets
+•  Recovery states</a:t>
+            </a:r>
+          </a:p>
+        </p:txBody>
+      </p:sp>
+      <p:sp>
+        <p:nvSpPr>
+          <p:cNvPr id="9" name="Rounded Rectangle 8"/>
+          <p:cNvSpPr/>
+          <p:nvPr/>
+        </p:nvSpPr>
+        <p:spPr>
+          <a:xfrm>
+            <a:off x="8046720" y="2194560"/>
+            <a:ext cx="3474720" cy="2834640"/>
+          </a:xfrm>
+          <a:prstGeom prst="roundRect">
+            <a:avLst/>
+          </a:prstGeom>
+          <a:solidFill>
+            <a:srgbClr val="142032"/>
+          </a:solidFill>
+          <a:ln>
+            <a:solidFill>
+              <a:srgbClr val="233750"/>
+            </a:solidFill>
+          </a:ln>
+        </p:spPr>
+        <p:style>
+          <a:lnRef idx="1">
+            <a:schemeClr val="accent1"/>
+          </a:lnRef>
+          <a:fillRef idx="3">
+            <a:schemeClr val="accent1"/>
+          </a:fillRef>
+          <a:effectRef idx="2">
+            <a:schemeClr val="accent1"/>
+          </a:effectRef>
+          <a:fontRef idx="minor">
+            <a:schemeClr val="lt1"/>
+          </a:fontRef>
+        </p:style>
+        <p:txBody>
+          <a:bodyPr rtlCol="0" anchor="ctr"/>
+          <a:lstStyle/>
+          <a:p>
+            <a:pPr algn="ctr"/>
+          </a:p>
+        </p:txBody>
+      </p:sp>
+      <p:sp>
+        <p:nvSpPr>
+          <p:cNvPr id="10" name="Rounded Rectangle 9"/>
+          <p:cNvSpPr/>
+          <p:nvPr/>
+        </p:nvSpPr>
+        <p:spPr>
+          <a:xfrm>
+            <a:off x="8275320" y="2423160"/>
+            <a:ext cx="548640" cy="365760"/>
+          </a:xfrm>
+          <a:prstGeom prst="roundRect">
+            <a:avLst/>
+          </a:prstGeom>
+          <a:solidFill>
+            <a:srgbClr val="E1AFEB"/>
+          </a:solidFill>
+          <a:ln>
+            <a:solidFill>
+              <a:srgbClr val="E1AFEB"/>
+            </a:solidFill>
+          </a:ln>
+        </p:spPr>
+        <p:style>
+          <a:lnRef idx="1">
+            <a:schemeClr val="accent1"/>
+          </a:lnRef>
+          <a:fillRef idx="3">
+            <a:schemeClr val="accent1"/>
+          </a:fillRef>
+          <a:effectRef idx="2">
+            <a:schemeClr val="accent1"/>
+          </a:effectRef>
+          <a:fontRef idx="minor">
+            <a:schemeClr val="lt1"/>
+          </a:fontRef>
+        </p:style>
+        <p:txBody>
+          <a:bodyPr rtlCol="0" anchor="ctr" wrap="square"/>
+          <a:lstStyle/>
+          <a:p>
+            <a:pPr/>
+            <a:r>
+              <a:rPr sz="1200" b="1">
+                <a:solidFill>
+                  <a:srgbClr val="0D1522"/>
                 </a:solidFill>
               </a:rPr>
-              <a:t>Event taxonomy
-</a:t>
-            </a:r>
-            <a:r>
-              <a:rPr b="0" sz="1100">
-                <a:solidFill>
-                  <a:srgbClr val="B4E628"/>
-                </a:solidFill>
-              </a:rPr>
-              <a:t>•  </a:t>
-            </a:r>
-            <a:r>
-              <a:rPr b="0" sz="1100">
-                <a:solidFill>
-                  <a:srgbClr val="DCE6F0"/>
-                </a:solidFill>
-              </a:rPr>
-              <a:t>Journey replay
-</a:t>
-            </a:r>
-            <a:r>
-              <a:rPr b="0" sz="1100">
-                <a:solidFill>
-                  <a:srgbClr val="B4E628"/>
-                </a:solidFill>
-              </a:rPr>
-              <a:t>•  </a:t>
-            </a:r>
-            <a:r>
-              <a:rPr b="0" sz="1100">
-                <a:solidFill>
-                  <a:srgbClr val="DCE6F0"/>
-                </a:solidFill>
-              </a:rPr>
-              <a:t>Owner baseline</a:t>
+              <a:t>03</a:t>
             </a:r>
           </a:p>
         </p:txBody>
@@ -4982,8 +5008,8 @@
         </p:nvSpPr>
         <p:spPr>
           <a:xfrm>
-            <a:off x="4663440" y="3017520"/>
-            <a:ext cx="2834640" cy="1645920"/>
+            <a:off x="8275320" y="3017520"/>
+            <a:ext cx="3017520" cy="1828800"/>
           </a:xfrm>
           <a:prstGeom prst="rect">
             <a:avLst/>
@@ -4999,98 +5025,103 @@
           </a:bodyPr>
           <a:lstStyle/>
           <a:p>
-            <a:pPr algn="l"/>
-            <a:r>
-              <a:rPr b="1" sz="1800">
+            <a:pPr/>
+            <a:r>
+              <a:rPr b="1" sz="2200">
                 <a:solidFill>
                   <a:srgbClr val="FFFFFF"/>
                 </a:solidFill>
               </a:rPr>
-              <a:t>Remove friction
+              <a:t>Scale the win
 </a:t>
             </a:r>
             <a:r>
-              <a:rPr b="1" sz="1000">
-                <a:solidFill>
-                  <a:srgbClr val="96D7F5"/>
+              <a:rPr b="1" sz="1100">
+                <a:solidFill>
+                  <a:srgbClr val="E1AFEB"/>
                 </a:solidFill>
               </a:rPr>
-              <a:t>WEEKS 4-8
+              <a:t>WEEKS 9-12
 </a:t>
             </a:r>
             <a:r>
-              <a:rPr b="0" sz="1100">
-                <a:solidFill>
-                  <a:srgbClr val="C8D2E1"/>
+              <a:rPr b="0" sz="1300">
+                <a:solidFill>
+                  <a:srgbClr val="B4C3D2"/>
                 </a:solidFill>
               </a:rPr>
-              <a:t>Ship the smallest changes that
-unblock first value.
+              <a:t>Standardize the loop and expand
+by segment.
 </a:t>
             </a:r>
             <a:r>
-              <a:rPr b="0" sz="1100">
-                <a:solidFill>
-                  <a:srgbClr val="96D7F5"/>
+              <a:rPr b="0" sz="1300">
+                <a:solidFill>
+                  <a:srgbClr val="C8D7E6"/>
                 </a:solidFill>
               </a:rPr>
-              <a:t>•  </a:t>
-            </a:r>
-            <a:r>
-              <a:rPr b="0" sz="1100">
-                <a:solidFill>
-                  <a:srgbClr val="DCE6F0"/>
-                </a:solidFill>
-              </a:rPr>
-              <a:t>Guided connector
-</a:t>
-            </a:r>
-            <a:r>
-              <a:rPr b="0" sz="1100">
-                <a:solidFill>
-                  <a:srgbClr val="96D7F5"/>
-                </a:solidFill>
-              </a:rPr>
-              <a:t>•  </a:t>
-            </a:r>
-            <a:r>
-              <a:rPr b="0" sz="1100">
-                <a:solidFill>
-                  <a:srgbClr val="DCE6F0"/>
-                </a:solidFill>
-              </a:rPr>
-              <a:t>Role presets
-</a:t>
-            </a:r>
-            <a:r>
-              <a:rPr b="0" sz="1100">
-                <a:solidFill>
-                  <a:srgbClr val="96D7F5"/>
-                </a:solidFill>
-              </a:rPr>
-              <a:t>•  </a:t>
-            </a:r>
-            <a:r>
-              <a:rPr b="0" sz="1100">
-                <a:solidFill>
-                  <a:srgbClr val="DCE6F0"/>
-                </a:solidFill>
-              </a:rPr>
-              <a:t>Recovery states</a:t>
-            </a:r>
-          </a:p>
-        </p:txBody>
-      </p:sp>
-      <p:sp>
-        <p:nvSpPr>
-          <p:cNvPr id="12" name="TextBox 11"/>
+              <a:t>•  Lifecycle prompts
+•  CS playbook
+•  Weekly scorecard</a:t>
+            </a:r>
+          </a:p>
+        </p:txBody>
+      </p:sp>
+      <p:sp>
+        <p:nvSpPr>
+          <p:cNvPr id="12" name="Rounded Rectangle 11"/>
+          <p:cNvSpPr/>
+          <p:nvPr/>
+        </p:nvSpPr>
+        <p:spPr>
+          <a:xfrm>
+            <a:off x="640080" y="5257800"/>
+            <a:ext cx="10881360" cy="594360"/>
+          </a:xfrm>
+          <a:prstGeom prst="roundRect">
+            <a:avLst/>
+          </a:prstGeom>
+          <a:solidFill>
+            <a:srgbClr val="C8F53C"/>
+          </a:solidFill>
+          <a:ln>
+            <a:solidFill>
+              <a:srgbClr val="C8F53C"/>
+            </a:solidFill>
+          </a:ln>
+        </p:spPr>
+        <p:style>
+          <a:lnRef idx="1">
+            <a:schemeClr val="accent1"/>
+          </a:lnRef>
+          <a:fillRef idx="3">
+            <a:schemeClr val="accent1"/>
+          </a:fillRef>
+          <a:effectRef idx="2">
+            <a:schemeClr val="accent1"/>
+          </a:effectRef>
+          <a:fontRef idx="minor">
+            <a:schemeClr val="lt1"/>
+          </a:fontRef>
+        </p:style>
+        <p:txBody>
+          <a:bodyPr rtlCol="0" anchor="ctr"/>
+          <a:lstStyle/>
+          <a:p>
+            <a:pPr algn="ctr"/>
+          </a:p>
+        </p:txBody>
+      </p:sp>
+      <p:sp>
+        <p:nvSpPr>
+          <p:cNvPr id="13" name="TextBox 12"/>
           <p:cNvSpPr txBox="1"/>
           <p:nvPr/>
         </p:nvSpPr>
         <p:spPr>
           <a:xfrm>
-            <a:off x="8366760" y="3017520"/>
-            <a:ext cx="2834640" cy="1645920"/>
+            <a:off x="822960" y="5349240"/>
+            <a:ext cx="10515600" cy="411480"/>
           </a:xfrm>
           <a:prstGeom prst="rect">
             <a:avLst/>
@@ -5106,128 +5137,23 @@
           </a:bodyPr>
           <a:lstStyle/>
           <a:p>
-            <a:pPr algn="l"/>
-            <a:r>
-              <a:rPr b="1" sz="1800">
-                <a:solidFill>
-                  <a:srgbClr val="FFFFFF"/>
+            <a:pPr/>
+            <a:r>
+              <a:rPr b="1" sz="1100">
+                <a:solidFill>
+                  <a:srgbClr val="0D1522"/>
                 </a:solidFill>
               </a:rPr>
-              <a:t>Scale the win
-</a:t>
-            </a:r>
-            <a:r>
-              <a:rPr b="1" sz="1000">
-                <a:solidFill>
-                  <a:srgbClr val="E6AFF0"/>
+              <a:t>DECISION TODAY      </a:t>
+            </a:r>
+            <a:r>
+              <a:rPr b="1" sz="1400">
+                <a:solidFill>
+                  <a:srgbClr val="0D1522"/>
                 </a:solidFill>
               </a:rPr>
-              <a:t>WEEKS 9-12
-</a:t>
-            </a:r>
-            <a:r>
-              <a:rPr b="0" sz="1100">
-                <a:solidFill>
-                  <a:srgbClr val="C8D2E1"/>
-                </a:solidFill>
-              </a:rPr>
-              <a:t>Standardize the loop and expand
-by segment.
-</a:t>
-            </a:r>
-            <a:r>
-              <a:rPr b="0" sz="1100">
-                <a:solidFill>
-                  <a:srgbClr val="E6AFF0"/>
-                </a:solidFill>
-              </a:rPr>
-              <a:t>•  </a:t>
-            </a:r>
-            <a:r>
-              <a:rPr b="0" sz="1100">
-                <a:solidFill>
-                  <a:srgbClr val="DCE6F0"/>
-                </a:solidFill>
-              </a:rPr>
-              <a:t>Lifecycle prompts
-</a:t>
-            </a:r>
-            <a:r>
-              <a:rPr b="0" sz="1100">
-                <a:solidFill>
-                  <a:srgbClr val="E6AFF0"/>
-                </a:solidFill>
-              </a:rPr>
-              <a:t>•  </a:t>
-            </a:r>
-            <a:r>
-              <a:rPr b="0" sz="1100">
-                <a:solidFill>
-                  <a:srgbClr val="DCE6F0"/>
-                </a:solidFill>
-              </a:rPr>
-              <a:t>CS playbook
-</a:t>
-            </a:r>
-            <a:r>
-              <a:rPr b="0" sz="1100">
-                <a:solidFill>
-                  <a:srgbClr val="E6AFF0"/>
-                </a:solidFill>
-              </a:rPr>
-              <a:t>•  </a:t>
-            </a:r>
-            <a:r>
-              <a:rPr b="0" sz="1100">
-                <a:solidFill>
-                  <a:srgbClr val="DCE6F0"/>
-                </a:solidFill>
-              </a:rPr>
-              <a:t>Weekly scorecard</a:t>
-            </a:r>
-          </a:p>
-        </p:txBody>
-      </p:sp>
-      <p:sp>
-        <p:nvSpPr>
-          <p:cNvPr id="13" name="Rounded Rectangle 12"/>
-          <p:cNvSpPr/>
-          <p:nvPr/>
-        </p:nvSpPr>
-        <p:spPr>
-          <a:xfrm>
-            <a:off x="731520" y="5074920"/>
-            <a:ext cx="10698480" cy="548640"/>
-          </a:xfrm>
-          <a:prstGeom prst="roundRect">
-            <a:avLst/>
-          </a:prstGeom>
-          <a:solidFill>
-            <a:srgbClr val="C8F528"/>
-          </a:solidFill>
-          <a:ln>
-            <a:solidFill/>
-          </a:ln>
-        </p:spPr>
-        <p:style>
-          <a:lnRef idx="1">
-            <a:schemeClr val="accent1"/>
-          </a:lnRef>
-          <a:fillRef idx="3">
-            <a:schemeClr val="accent1"/>
-          </a:fillRef>
-          <a:effectRef idx="2">
-            <a:schemeClr val="accent1"/>
-          </a:effectRef>
-          <a:fontRef idx="minor">
-            <a:schemeClr val="lt1"/>
-          </a:fontRef>
-        </p:style>
-        <p:txBody>
-          <a:bodyPr rtlCol="0" anchor="ctr"/>
-          <a:lstStyle/>
-          <a:p>
-            <a:pPr algn="ctr"/>
+              <a:t>Fund one activation squad for 90 days; review progress every Friday.</a:t>
+            </a:r>
           </a:p>
         </p:txBody>
       </p:sp>
@@ -5239,8 +5165,8 @@
         </p:nvSpPr>
         <p:spPr>
           <a:xfrm>
-            <a:off x="1005840" y="5138928"/>
-            <a:ext cx="10058400" cy="411480"/>
+            <a:off x="10972800" y="5943600"/>
+            <a:ext cx="731520" cy="457200"/>
           </a:xfrm>
           <a:prstGeom prst="rect">
             <a:avLst/>
@@ -5256,54 +5182,9 @@
           </a:bodyPr>
           <a:lstStyle/>
           <a:p>
-            <a:pPr algn="l"/>
-            <a:r>
-              <a:rPr b="1" sz="1100">
-                <a:solidFill>
-                  <a:srgbClr val="0F1724"/>
-                </a:solidFill>
-              </a:rPr>
-              <a:t>DECISION TODAY         </a:t>
-            </a:r>
-            <a:r>
-              <a:rPr b="1" sz="1300">
-                <a:solidFill>
-                  <a:srgbClr val="0F1724"/>
-                </a:solidFill>
-              </a:rPr>
-              <a:t>Fund one activation squad for 90 days; review progress every Friday.</a:t>
-            </a:r>
-          </a:p>
-        </p:txBody>
-      </p:sp>
-      <p:sp>
-        <p:nvSpPr>
-          <p:cNvPr id="15" name="TextBox 14"/>
-          <p:cNvSpPr txBox="1"/>
-          <p:nvPr/>
-        </p:nvSpPr>
-        <p:spPr>
-          <a:xfrm>
-            <a:off x="10515600" y="5760720"/>
-            <a:ext cx="914400" cy="365760"/>
-          </a:xfrm>
-          <a:prstGeom prst="rect">
-            <a:avLst/>
-          </a:prstGeom>
-          <a:noFill/>
-          <a:ln>
-            <a:solidFill/>
-          </a:ln>
-        </p:spPr>
-        <p:txBody>
-          <a:bodyPr wrap="square">
-            <a:normAutofit/>
-          </a:bodyPr>
-          <a:lstStyle/>
-          <a:p>
             <a:pPr algn="r"/>
             <a:r>
-              <a:rPr sz="1400" b="0">
+              <a:rPr sz="1400">
                 <a:solidFill>
                   <a:srgbClr val="8C9BAF"/>
                 </a:solidFill>
